--- a/線上組-蔡承佑.pptx
+++ b/線上組-蔡承佑.pptx
@@ -113,6 +113,11 @@
       </a:defRPr>
     </a:lvl9pPr>
   </p:defaultTextStyle>
+  <p:extLst>
+    <p:ext uri="{EFAFB233-063F-42B5-8137-9DF3F51BA10A}">
+      <p15:sldGuideLst xmlns:p15="http://schemas.microsoft.com/office/powerpoint/2012/main"/>
+    </p:ext>
+  </p:extLst>
 </p:presentation>
 </file>
 
@@ -4453,7 +4458,9 @@
         </p:nvSpPr>
         <p:spPr/>
         <p:txBody>
-          <a:bodyPr/>
+          <a:bodyPr>
+            <a:normAutofit lnSpcReduction="10000"/>
+          </a:bodyPr>
           <a:lstStyle/>
           <a:p>
             <a:r>
@@ -4517,6 +4524,22 @@
               <a:rPr lang="zh-TW" altLang="en-US" dirty="0"/>
               <a:t>驗證</a:t>
             </a:r>
+            <a:endParaRPr lang="en-US" altLang="zh-TW" dirty="0"/>
+          </a:p>
+          <a:p>
+            <a:endParaRPr lang="en-US" altLang="zh-TW" dirty="0"/>
+          </a:p>
+          <a:p>
+            <a:pPr lvl="1"/>
+            <a:r>
+              <a:rPr lang="en-US" altLang="zh-TW" dirty="0"/>
+              <a:t>Launch “node server.js” before doing </a:t>
+            </a:r>
+            <a:r>
+              <a:rPr lang="en-US" altLang="zh-TW"/>
+              <a:t>this function</a:t>
+            </a:r>
+            <a:endParaRPr lang="zh-TW" altLang="en-US" dirty="0"/>
           </a:p>
         </p:txBody>
       </p:sp>
